--- a/artifacts/speaking-portfolio-expanded/decks/retrieval-40min-handout.pptx
+++ b/artifacts/speaking-portfolio-expanded/decks/retrieval-40min-handout.pptx
@@ -2856,7 +2856,7 @@
                 <a:ea typeface="Arial"/>
                 <a:cs typeface="Arial"/>
               </a:rPr>
-              <a:t xml:space="preserve">&gt; Your eval suite has a grandfather.</a:t>
+              <a:t xml:space="preserve">&gt; Three search methods in a fundable trenchcoat.</a:t>
             </a:r>
             <a:endParaRPr lang="en-US" sz="1200"/>
           </a:p>
@@ -7600,7 +7600,30 @@
                 <a:ea typeface="Arial"/>
                 <a:cs typeface="Arial"/>
               </a:rPr>
-              <a:t xml:space="preserve">Your Eval Suite Has a Grandfather</a:t>
+              <a:t xml:space="preserve">Three Search Methods in a Fundable</a:t>
+            </a:r>
+            <a:endParaRPr lang="en-US" sz="3750"/>
+          </a:p>
+          <a:p>
+            <a:pPr marL="0" indent="0">
+              <a:lnSpc>
+                <a:spcPts val="4500"/>
+              </a:lnSpc>
+              <a:spcAft>
+                <a:spcPts val="0"/>
+              </a:spcAft>
+              <a:buNone/>
+            </a:pPr>
+            <a:r>
+              <a:rPr lang="en-US" sz="3750" b="1">
+                <a:solidFill>
+                  <a:srgbClr val="202B33"/>
+                </a:solidFill>
+                <a:latin typeface="Arial"/>
+                <a:ea typeface="Arial"/>
+                <a:cs typeface="Arial"/>
+              </a:rPr>
+              <a:t xml:space="preserve">Trenchcoat</a:t>
             </a:r>
             <a:endParaRPr lang="en-US" sz="3750"/>
           </a:p>
@@ -7770,7 +7793,7 @@
                 <a:ea typeface="Arial"/>
                 <a:cs typeface="Arial"/>
               </a:rPr>
-              <a:t xml:space="preserve">Your Eval Suite Has a Grandfather</a:t>
+              <a:t xml:space="preserve">Three Search Methods in a Fundable Trenchcoat</a:t>
             </a:r>
             <a:endParaRPr lang="en-US" sz="975"/>
           </a:p>
@@ -8566,7 +8589,7 @@
                 <a:ea typeface="Arial"/>
                 <a:cs typeface="Arial"/>
               </a:rPr>
-              <a:t xml:space="preserve">Your Eval Suite Has a Grandfather</a:t>
+              <a:t xml:space="preserve">Three Search Methods in a Fundable Trenchcoat</a:t>
             </a:r>
             <a:endParaRPr lang="en-US" sz="975"/>
           </a:p>
@@ -9675,7 +9698,7 @@
                 <a:ea typeface="Arial"/>
                 <a:cs typeface="Arial"/>
               </a:rPr>
-              <a:t xml:space="preserve">Your Eval Suite Has a Grandfather</a:t>
+              <a:t xml:space="preserve">Three Search Methods in a Fundable Trenchcoat</a:t>
             </a:r>
             <a:endParaRPr lang="en-US" sz="975"/>
           </a:p>
@@ -10577,7 +10600,7 @@
                 <a:ea typeface="Arial"/>
                 <a:cs typeface="Arial"/>
               </a:rPr>
-              <a:t xml:space="preserve">Your Eval Suite Has a Grandfather</a:t>
+              <a:t xml:space="preserve">Three Search Methods in a Fundable Trenchcoat</a:t>
             </a:r>
             <a:endParaRPr lang="en-US" sz="975"/>
           </a:p>
@@ -11502,7 +11525,7 @@
                 <a:ea typeface="Arial"/>
                 <a:cs typeface="Arial"/>
               </a:rPr>
-              <a:t xml:space="preserve">Your Eval Suite Has a Grandfather</a:t>
+              <a:t xml:space="preserve">Three Search Methods in a Fundable Trenchcoat</a:t>
             </a:r>
             <a:endParaRPr lang="en-US" sz="975"/>
           </a:p>
@@ -12335,7 +12358,7 @@
                 <a:ea typeface="Arial"/>
                 <a:cs typeface="Arial"/>
               </a:rPr>
-              <a:t xml:space="preserve">Your Eval Suite Has a Grandfather</a:t>
+              <a:t xml:space="preserve">Three Search Methods in a Fundable Trenchcoat</a:t>
             </a:r>
             <a:endParaRPr lang="en-US" sz="975"/>
           </a:p>
@@ -13191,7 +13214,7 @@
                 <a:ea typeface="Arial"/>
                 <a:cs typeface="Arial"/>
               </a:rPr>
-              <a:t xml:space="preserve">Your Eval Suite Has a Grandfather</a:t>
+              <a:t xml:space="preserve">Three Search Methods in a Fundable Trenchcoat</a:t>
             </a:r>
             <a:endParaRPr lang="en-US" sz="975"/>
           </a:p>
@@ -13420,7 +13443,30 @@
                 <a:ea typeface="Arial"/>
                 <a:cs typeface="Arial"/>
               </a:rPr>
-              <a:t xml:space="preserve">Your eval suite has a grandfather.</a:t>
+              <a:t xml:space="preserve">Three search methods in a fundable</a:t>
+            </a:r>
+            <a:endParaRPr lang="en-US" sz="1500"/>
+          </a:p>
+          <a:p>
+            <a:pPr marL="0" indent="0">
+              <a:lnSpc>
+                <a:spcPts val="1950"/>
+              </a:lnSpc>
+              <a:spcAft>
+                <a:spcPts val="0"/>
+              </a:spcAft>
+              <a:buNone/>
+            </a:pPr>
+            <a:r>
+              <a:rPr lang="en-US" sz="1500" b="0">
+                <a:solidFill>
+                  <a:srgbClr val="202B33"/>
+                </a:solidFill>
+                <a:latin typeface="Arial"/>
+                <a:ea typeface="Arial"/>
+                <a:cs typeface="Arial"/>
+              </a:rPr>
+              <a:t xml:space="preserve">trenchcoat.</a:t>
             </a:r>
             <a:endParaRPr lang="en-US" sz="1500"/>
           </a:p>
@@ -13628,29 +13674,6 @@
                 <a:cs typeface="Arial"/>
               </a:rPr>
               <a:t xml:space="preserve">Those words tell us why rare identifiers</a:t>
-            </a:r>
-            <a:endParaRPr lang="en-US" sz="1500"/>
-          </a:p>
-          <a:p>
-            <a:pPr marL="0" indent="0">
-              <a:lnSpc>
-                <a:spcPts val="1950"/>
-              </a:lnSpc>
-              <a:spcAft>
-                <a:spcPts val="0"/>
-              </a:spcAft>
-              <a:buNone/>
-            </a:pPr>
-            <a:r>
-              <a:rPr lang="en-US" sz="1500" b="0">
-                <a:solidFill>
-                  <a:srgbClr val="202B33"/>
-                </a:solidFill>
-                <a:latin typeface="Arial"/>
-                <a:ea typeface="Arial"/>
-                <a:cs typeface="Arial"/>
-              </a:rPr>
-              <a:t xml:space="preserve">matter, why synonyms are hard, why a</a:t>
             </a:r>
             <a:endParaRPr lang="en-US" sz="1500"/>
           </a:p>
@@ -13699,6 +13722,29 @@
                 <a:ea typeface="Arial"/>
                 <a:cs typeface="Arial"/>
               </a:rPr>
+              <a:t xml:space="preserve">matter, why synonyms are hard, why a</a:t>
+            </a:r>
+            <a:endParaRPr lang="en-US" sz="1500"/>
+          </a:p>
+          <a:p>
+            <a:pPr marL="0" indent="0">
+              <a:lnSpc>
+                <a:spcPts val="1950"/>
+              </a:lnSpc>
+              <a:spcAft>
+                <a:spcPts val="0"/>
+              </a:spcAft>
+              <a:buNone/>
+            </a:pPr>
+            <a:r>
+              <a:rPr lang="en-US" sz="1500" b="0">
+                <a:solidFill>
+                  <a:srgbClr val="202B33"/>
+                </a:solidFill>
+                <a:latin typeface="Arial"/>
+                <a:ea typeface="Arial"/>
+                <a:cs typeface="Arial"/>
+              </a:rPr>
               <a:t xml:space="preserve">passage needs its exception, and why the</a:t>
             </a:r>
             <a:endParaRPr lang="en-US" sz="1500"/>
@@ -13955,7 +14001,7 @@
                 <a:ea typeface="Arial"/>
                 <a:cs typeface="Arial"/>
               </a:rPr>
-              <a:t xml:space="preserve">Your Eval Suite Has a Grandfather</a:t>
+              <a:t xml:space="preserve">Three Search Methods in a Fundable Trenchcoat</a:t>
             </a:r>
             <a:endParaRPr lang="en-US" sz="975"/>
           </a:p>
@@ -15179,7 +15225,7 @@
                 <a:ea typeface="Arial"/>
                 <a:cs typeface="Arial"/>
               </a:rPr>
-              <a:t xml:space="preserve">Your Eval Suite Has a Grandfather</a:t>
+              <a:t xml:space="preserve">Three Search Methods in a Fundable Trenchcoat</a:t>
             </a:r>
             <a:endParaRPr lang="en-US" sz="975"/>
           </a:p>
@@ -16058,7 +16104,7 @@
                 <a:ea typeface="Arial"/>
                 <a:cs typeface="Arial"/>
               </a:rPr>
-              <a:t xml:space="preserve">Your Eval Suite Has a Grandfather</a:t>
+              <a:t xml:space="preserve">Three Search Methods in a Fundable Trenchcoat</a:t>
             </a:r>
             <a:endParaRPr lang="en-US" sz="975"/>
           </a:p>
@@ -16891,7 +16937,7 @@
                 <a:ea typeface="Arial"/>
                 <a:cs typeface="Arial"/>
               </a:rPr>
-              <a:t xml:space="preserve">Your Eval Suite Has a Grandfather</a:t>
+              <a:t xml:space="preserve">Three Search Methods in a Fundable Trenchcoat</a:t>
             </a:r>
             <a:endParaRPr lang="en-US" sz="975"/>
           </a:p>
@@ -17678,7 +17724,7 @@
                 <a:ea typeface="Arial"/>
                 <a:cs typeface="Arial"/>
               </a:rPr>
-              <a:t xml:space="preserve">Your Eval Suite Has a Grandfather</a:t>
+              <a:t xml:space="preserve">Three Search Methods in a Fundable Trenchcoat</a:t>
             </a:r>
             <a:endParaRPr lang="en-US" sz="975"/>
           </a:p>
@@ -18511,7 +18557,7 @@
                 <a:ea typeface="Arial"/>
                 <a:cs typeface="Arial"/>
               </a:rPr>
-              <a:t xml:space="preserve">Your Eval Suite Has a Grandfather</a:t>
+              <a:t xml:space="preserve">Three Search Methods in a Fundable Trenchcoat</a:t>
             </a:r>
             <a:endParaRPr lang="en-US" sz="975"/>
           </a:p>
@@ -19390,7 +19436,7 @@
                 <a:ea typeface="Arial"/>
                 <a:cs typeface="Arial"/>
               </a:rPr>
-              <a:t xml:space="preserve">Your Eval Suite Has a Grandfather</a:t>
+              <a:t xml:space="preserve">Three Search Methods in a Fundable Trenchcoat</a:t>
             </a:r>
             <a:endParaRPr lang="en-US" sz="975"/>
           </a:p>
@@ -20200,7 +20246,7 @@
                 <a:ea typeface="Arial"/>
                 <a:cs typeface="Arial"/>
               </a:rPr>
-              <a:t xml:space="preserve">Your Eval Suite Has a Grandfather</a:t>
+              <a:t xml:space="preserve">Three Search Methods in a Fundable Trenchcoat</a:t>
             </a:r>
             <a:endParaRPr lang="en-US" sz="975"/>
           </a:p>
@@ -21079,7 +21125,7 @@
                 <a:ea typeface="Arial"/>
                 <a:cs typeface="Arial"/>
               </a:rPr>
-              <a:t xml:space="preserve">Your Eval Suite Has a Grandfather</a:t>
+              <a:t xml:space="preserve">Three Search Methods in a Fundable Trenchcoat</a:t>
             </a:r>
             <a:endParaRPr lang="en-US" sz="975"/>
           </a:p>
@@ -21889,7 +21935,7 @@
                 <a:ea typeface="Arial"/>
                 <a:cs typeface="Arial"/>
               </a:rPr>
-              <a:t xml:space="preserve">Your Eval Suite Has a Grandfather</a:t>
+              <a:t xml:space="preserve">Three Search Methods in a Fundable Trenchcoat</a:t>
             </a:r>
             <a:endParaRPr lang="en-US" sz="975"/>
           </a:p>
@@ -22883,7 +22929,7 @@
                 <a:ea typeface="Arial"/>
                 <a:cs typeface="Arial"/>
               </a:rPr>
-              <a:t xml:space="preserve">Your Eval Suite Has a Grandfather</a:t>
+              <a:t xml:space="preserve">Three Search Methods in a Fundable Trenchcoat</a:t>
             </a:r>
             <a:endParaRPr lang="en-US" sz="975"/>
           </a:p>

--- a/artifacts/speaking-portfolio-expanded/decks/retrieval-40min-handout.pptx
+++ b/artifacts/speaking-portfolio-expanded/decks/retrieval-40min-handout.pptx
@@ -635,7 +635,7 @@
                 <a:ea typeface="Arial"/>
                 <a:cs typeface="Arial"/>
               </a:rPr>
-              <a:t xml:space="preserve">Demo: the hole in the golden set</a:t>
+              <a:t xml:space="preserve">Fool's Golden Dataset</a:t>
             </a:r>
             <a:endParaRPr lang="en-US" sz="1200"/>
           </a:p>
@@ -911,7 +911,7 @@
                 <a:ea typeface="Arial"/>
                 <a:cs typeface="Arial"/>
               </a:rPr>
-              <a:t xml:space="preserve">TREC used pooling because judging every document for every query was impractical. Zobel investigated reliability with incomplete judgments. The risk is real; universal failure is not. In a 2022 recheck, Voorhees, Soboroff, and Lin expanded TREC-8 judgments and found system-rank correlations above point nine nine. Deep, diverse pools had held up.</a:t>
+              <a:t xml:space="preserve">TREC used pooling because judging every document for every query was impractical. Zobel investigated reliability with incomplete judgments. The risk is real; universal failure is not. In a 2022 recheck, Voorhees, Soboroff, and Lin added judgments to TREC-8 and compared how the systems ranked before and after. The ordering barely moved. Deep, diverse pools had held up.</a:t>
             </a:r>
             <a:endParaRPr lang="en-US" sz="1200"/>
           </a:p>
@@ -1574,7 +1574,7 @@
                 <a:ea typeface="Arial"/>
                 <a:cs typeface="Arial"/>
               </a:rPr>
-              <a:t xml:space="preserve">What changed: the next reader is a generator</a:t>
+              <a:t xml:space="preserve">The Reader Stopped Being a Person</a:t>
             </a:r>
             <a:endParaRPr lang="en-US" sz="1200"/>
           </a:p>
@@ -1827,7 +1827,7 @@
                 <a:ea typeface="Arial"/>
                 <a:cs typeface="Arial"/>
               </a:rPr>
-              <a:t xml:space="preserve">Evaluate the handoff. Did retrieval find B and F? Did context assembly keep their relationship? Did the answer cite the actual exception? If the answer is wrong, those checks locate the failure instead of blaming the nearest model. IR also studied machine consumers before modern RAG; the change here is this particular generative handoff and its failure modes.</a:t>
+              <a:t xml:space="preserve">Evaluate the handoff. Did retrieval find B and F? Did context assembly keep their relationship? Did the answer cite the actual exception? If the answer is wrong, those checks locate the failure instead of blaming the nearest model.</a:t>
             </a:r>
             <a:endParaRPr lang="en-US" sz="1200"/>
           </a:p>
@@ -2513,7 +2513,7 @@
                 <a:ea typeface="Arial"/>
                 <a:cs typeface="Arial"/>
               </a:rPr>
-              <a:t xml:space="preserve">McDermott's R1 configured computer systems at DEC. The journal paper is from 1982. This was working software, not a cautionary fable about people foolish enough to use rules.</a:t>
+              <a:t xml:space="preserve">McDermott's R1 configured computer systems at DEC. The journal paper is from 1982. This was working software.</a:t>
             </a:r>
             <a:endParaRPr lang="en-US" sz="1200"/>
           </a:p>
@@ -2651,7 +2651,7 @@
                 <a:ea typeface="Arial"/>
                 <a:cs typeface="Arial"/>
               </a:rPr>
-              <a:t xml:space="preserve">Source: John McDermott (1982), [R1: A rule-based configurer of computer systems](https://www.sciencedirect.com/science/article/abs/pii/0004370282900212), Artificial Intelligence 19(1), 39–88. The maintenance application is the speaker’s argument, not a claim that this paper explains the industry’s decline.</a:t>
+              <a:t xml:space="preserve">Source: John McDermott (1982), [R1: A rule-based configurer of computer systems](https://www.sciencedirect.com/science/article/abs/pii/0004370282900212), Artificial Intelligence 19(1), 39–88.</a:t>
             </a:r>
             <a:endParaRPr lang="en-US" sz="1200"/>
           </a:p>
@@ -2856,7 +2856,7 @@
                 <a:ea typeface="Arial"/>
                 <a:cs typeface="Arial"/>
               </a:rPr>
-              <a:t xml:space="preserve">&gt; Three search methods in a fundable trenchcoat.</a:t>
+              <a:t xml:space="preserve">&gt; Three search methods. One instrument nobody checked.</a:t>
             </a:r>
             <a:endParaRPr lang="en-US" sz="1200"/>
           </a:p>
@@ -3017,7 +3017,7 @@
                 <a:ea typeface="Arial"/>
                 <a:cs typeface="Arial"/>
               </a:rPr>
-              <a:t xml:space="preserve">Sixty years since the Cranfield report. The field did not just build evaluations. It investigated when they could be trusted. Go find the documents your eval set never judged.</a:t>
+              <a:t xml:space="preserve">Three search methods in a fundable trenchcoat. That is a fair joke about the retriever, and the coat is not the problem. Lexical, dense, hybrid: we inherited all three. What we left behind was the sixty years of checking whether the score underneath was telling the truth. Go find the documents your eval set never judged.</a:t>
             </a:r>
             <a:endParaRPr lang="en-US" sz="1200"/>
           </a:p>
@@ -3063,7 +3063,7 @@
                 <a:ea typeface="Arial"/>
                 <a:cs typeface="Arial"/>
               </a:rPr>
-              <a:t xml:space="preserve">Stage direction: Leave the B/F example up during questions. Keep all eight terms in the notes; the screen closes on the instruction.</a:t>
+              <a:t xml:space="preserve">Stage direction: Say the title line once, flat, then drop to the instruction. Leave the B/F example up during questions. Keep all eight terms in the notes; the screen closes on the instruction.</a:t>
             </a:r>
             <a:endParaRPr lang="en-US" sz="1200"/>
           </a:p>
@@ -3153,7 +3153,7 @@
                 <a:ea typeface="Arial"/>
                 <a:cs typeface="Arial"/>
               </a:rPr>
-              <a:t xml:space="preserve">Karen Sparck Jones (1972), A statistical interpretation of term specificity and its application in retrieval, Journal of Documentation 28(1), 11–21. [Author’s publication archive](https://www.cl.cam.ac.uk/archive/ksj21/ksjdigipapers/ksjbib3.html).</a:t>
+              <a:t xml:space="preserve">Karen Spärck Jones (1972), A statistical interpretation of term specificity and its application in retrieval, Journal of Documentation 28(1), 11–21. [Author’s publication archive](https://www.cl.cam.ac.uk/archive/ksj21/ksjdigipapers/ksjbib3.html).</a:t>
             </a:r>
             <a:endParaRPr lang="en-US" sz="1200"/>
           </a:p>
@@ -3521,7 +3521,7 @@
                 <a:ea typeface="Arial"/>
                 <a:cs typeface="Arial"/>
               </a:rPr>
-              <a:t xml:space="preserve">John McDermott (1982), [R1: A rule-based configurer of computer systems](https://www.sciencedirect.com/science/article/abs/pii/0004370282900212), Artificial Intelligence 19(1), 39–88. The maintenance application is the speaker’s argument, not a claim that this paper explains the industry’s decline.</a:t>
+              <a:t xml:space="preserve">John McDermott (1982), [R1: A rule-based configurer of computer systems](https://www.sciencedirect.com/science/article/abs/pii/0004370282900212), Artificial Intelligence 19(1), 39–88.</a:t>
             </a:r>
             <a:endParaRPr lang="en-US" sz="1200"/>
           </a:p>
@@ -3588,7 +3588,7 @@
                 <a:ea typeface="Arial"/>
                 <a:cs typeface="Arial"/>
               </a:rPr>
-              <a:t xml:space="preserve">Karen Sparck Jones (1972), A statistical interpretation of term specificity and its application in retrieval, Journal of Documentation 28(1), 11–21. [Author’s publication archive](https://www.cl.cam.ac.uk/archive/ksj21/ksjdigipapers/ksjbib3.html).</a:t>
+              <a:t xml:space="preserve">Karen Spärck Jones (1972), A statistical interpretation of term specificity and its application in retrieval, Journal of Documentation 28(1), 11–21. [Author’s publication archive](https://www.cl.cam.ac.uk/archive/ksj21/ksjdigipapers/ksjbib3.html).</a:t>
             </a:r>
             <a:endParaRPr lang="en-US" sz="1200"/>
           </a:p>
@@ -3956,7 +3956,7 @@
                 <a:ea typeface="Arial"/>
                 <a:cs typeface="Arial"/>
               </a:rPr>
-              <a:t xml:space="preserve">John McDermott (1982), [R1: A rule-based configurer of computer systems](https://www.sciencedirect.com/science/article/abs/pii/0004370282900212), Artificial Intelligence 19(1), 39–88. The maintenance application is the speaker’s argument, not a claim that this paper explains the industry’s decline.</a:t>
+              <a:t xml:space="preserve">John McDermott (1982), [R1: A rule-based configurer of computer systems](https://www.sciencedirect.com/science/article/abs/pii/0004370282900212), Artificial Intelligence 19(1), 39–88.</a:t>
             </a:r>
             <a:endParaRPr lang="en-US" sz="1200"/>
           </a:p>
@@ -4939,7 +4939,7 @@
                 <a:ea typeface="Arial"/>
                 <a:cs typeface="Arial"/>
               </a:rPr>
-              <a:t xml:space="preserve">&gt; Karen Sparck Jones · term specificity</a:t>
+              <a:t xml:space="preserve">&gt; Karen Spärck Jones · term specificity</a:t>
             </a:r>
             <a:endParaRPr lang="en-US" sz="1200"/>
           </a:p>
@@ -5008,7 +5008,7 @@
                 <a:ea typeface="Arial"/>
                 <a:cs typeface="Arial"/>
               </a:rPr>
-              <a:t xml:space="preserve">Karen Sparck Jones published a statistical interpretation of term specificity in 1972. A word that appears in almost every document tells you less about which document you want than a rare term does.</a:t>
+              <a:t xml:space="preserve">Karen Spärck Jones published a statistical interpretation of term specificity in 1972. A word that appears in almost every document tells you less about which document you want than a rare term does.</a:t>
             </a:r>
             <a:endParaRPr lang="en-US" sz="1200"/>
           </a:p>
@@ -5100,7 +5100,7 @@
                 <a:ea typeface="Arial"/>
                 <a:cs typeface="Arial"/>
               </a:rPr>
-              <a:t xml:space="preserve">Fifty-four years. We have had time to put her name on the slide. The point is not that every rare word is relevant. A typo can be rare. The point is that corpus frequency supplies evidence, and the evidence has a history and assumptions you can inspect.</a:t>
+              <a:t xml:space="preserve">Fifty-four years. We have had time to put her name on the slide. The point is that corpus frequency supplies evidence, and the evidence has a history and assumptions you can inspect.</a:t>
             </a:r>
             <a:endParaRPr lang="en-US" sz="1200"/>
           </a:p>
@@ -5192,7 +5192,7 @@
                 <a:ea typeface="Arial"/>
                 <a:cs typeface="Arial"/>
               </a:rPr>
-              <a:t xml:space="preserve">Source: Karen Sparck Jones (1972), A statistical interpretation of term specificity and its application in retrieval, Journal of Documentation 28(1), 11–21. [Author’s publication archive](https://www.cl.cam.ac.uk/archive/ksj21/ksjdigipapers/ksjbib3.html).</a:t>
+              <a:t xml:space="preserve">Source: Karen Spärck Jones (1972), A statistical interpretation of term specificity and its application in retrieval, Journal of Documentation 28(1), 11–21. [Author’s publication archive](https://www.cl.cam.ac.uk/archive/ksj21/ksjdigipapers/ksjbib3.html).</a:t>
             </a:r>
             <a:endParaRPr lang="en-US" sz="1200"/>
           </a:p>
@@ -5305,7 +5305,7 @@
                 <a:ea typeface="Arial"/>
                 <a:cs typeface="Arial"/>
               </a:rPr>
-              <a:t xml:space="preserve">1975 and 1990: the vector was already there</a:t>
+              <a:t xml:space="preserve">Vector Database, 1975</a:t>
             </a:r>
             <a:endParaRPr lang="en-US" sz="1200"/>
           </a:p>
@@ -6336,7 +6336,7 @@
                 <a:ea typeface="Arial"/>
                 <a:cs typeface="Arial"/>
               </a:rPr>
-              <a:t xml:space="preserve">Passage retrieval was being studied before our chunk-size arguments acquired a token budget. Salton, Allan, and Buckley compared approaches in 1993.</a:t>
+              <a:t xml:space="preserve">Passage retrieval was being studied before our chunk-size arguments acquired a token budget. Salton, Allan, and Buckley compared approaches in 1993. Chunk size was an open research question in 1993 and a forum thread in 2024. One of those had a control group.</a:t>
             </a:r>
             <a:endParaRPr lang="en-US" sz="1200"/>
           </a:p>
@@ -6840,7 +6840,7 @@
                 <a:ea typeface="Arial"/>
                 <a:cs typeface="Arial"/>
               </a:rPr>
-              <a:t xml:space="preserve">Run the comparison on the same corpus, queries, and judgments. Otherwise you have compared two demonstrations and called the difference a model improvement.</a:t>
+              <a:t xml:space="preserve">Lexical, dense, hybrid. Those are the three search methods in the trenchcoat, and the pitch usually names one of them. Run the comparison on the same corpus, queries, and judgments. Otherwise you have compared two demonstrations and called the difference a model improvement.</a:t>
             </a:r>
             <a:endParaRPr lang="en-US" sz="1200"/>
           </a:p>
@@ -8003,7 +8003,7 @@
       </p:sp>
       <p:pic>
         <p:nvPicPr>
-          <p:cNvPr id="5" name="3d65c12ae661fd9ad5ccfdb4af281d085e0dc1608a0306f237db7921c07bcdad" descr="Cranfield, Bedfordshire, 1966"/>
+          <p:cNvPr id="5" name="a6b4d212c36d475ddccc3e605d3fe5942640332d496970d4988bbc2917bbc042" descr="Cranfield, Bedfordshire, 1966"/>
           <p:cNvPicPr>
             <a:picLocks noChangeAspect="1"/>
           </p:cNvPicPr>
@@ -8769,7 +8769,7 @@
                 <a:ea typeface="Arial"/>
                 <a:cs typeface="Arial"/>
               </a:rPr>
-              <a:t xml:space="preserve">Demo: the hole in the golden set</a:t>
+              <a:t xml:space="preserve">Fool's Golden Dataset</a:t>
             </a:r>
             <a:endParaRPr lang="en-US" sz="2550"/>
           </a:p>
@@ -9213,6 +9213,29 @@
             </a:r>
             <a:endParaRPr lang="en-US" sz="1500"/>
           </a:p>
+          <a:p>
+            <a:pPr marL="0" indent="0">
+              <a:lnSpc>
+                <a:spcPts val="1950"/>
+              </a:lnSpc>
+              <a:spcAft>
+                <a:spcPts val="0"/>
+              </a:spcAft>
+              <a:buNone/>
+            </a:pPr>
+            <a:r>
+              <a:rPr lang="en-US" sz="1500" b="0">
+                <a:solidFill>
+                  <a:srgbClr val="202B33"/>
+                </a:solidFill>
+                <a:latin typeface="Arial"/>
+                <a:ea typeface="Arial"/>
+                <a:cs typeface="Arial"/>
+              </a:rPr>
+              <a:t xml:space="preserve">Judge F under the same rubric and the new</a:t>
+            </a:r>
+            <a:endParaRPr lang="en-US" sz="1500"/>
+          </a:p>
         </p:txBody>
       </p:sp>
       <p:sp>
@@ -9258,29 +9281,6 @@
                 <a:ea typeface="Arial"/>
                 <a:cs typeface="Arial"/>
               </a:rPr>
-              <a:t xml:space="preserve">Judge F under the same rubric and the new</a:t>
-            </a:r>
-            <a:endParaRPr lang="en-US" sz="1500"/>
-          </a:p>
-          <a:p>
-            <a:pPr marL="0" indent="0">
-              <a:lnSpc>
-                <a:spcPts val="1950"/>
-              </a:lnSpc>
-              <a:spcAft>
-                <a:spcPts val="0"/>
-              </a:spcAft>
-              <a:buNone/>
-            </a:pPr>
-            <a:r>
-              <a:rPr lang="en-US" sz="1500" b="0">
-                <a:solidFill>
-                  <a:srgbClr val="202B33"/>
-                </a:solidFill>
-                <a:latin typeface="Arial"/>
-                <a:ea typeface="Arial"/>
-                <a:cs typeface="Arial"/>
-              </a:rPr>
               <a:t xml:space="preserve">run returns to one. We changed no retrieval</a:t>
             </a:r>
             <a:endParaRPr lang="en-US" sz="1500"/>
@@ -9465,76 +9465,99 @@
                 <a:ea typeface="Arial"/>
                 <a:cs typeface="Arial"/>
               </a:rPr>
-              <a:t xml:space="preserve">recheck, Voorhees, Soboroff, and Lin</a:t>
-            </a:r>
-            <a:endParaRPr lang="en-US" sz="1500"/>
-          </a:p>
-          <a:p>
-            <a:pPr marL="0" indent="0">
-              <a:lnSpc>
-                <a:spcPts val="1950"/>
-              </a:lnSpc>
-              <a:spcAft>
-                <a:spcPts val="0"/>
-              </a:spcAft>
-              <a:buNone/>
-            </a:pPr>
-            <a:r>
-              <a:rPr lang="en-US" sz="1500" b="0">
-                <a:solidFill>
-                  <a:srgbClr val="202B33"/>
-                </a:solidFill>
-                <a:latin typeface="Arial"/>
-                <a:ea typeface="Arial"/>
-                <a:cs typeface="Arial"/>
-              </a:rPr>
-              <a:t xml:space="preserve">expanded TREC-8 judgments and found</a:t>
-            </a:r>
-            <a:endParaRPr lang="en-US" sz="1500"/>
-          </a:p>
-          <a:p>
-            <a:pPr marL="0" indent="0">
-              <a:lnSpc>
-                <a:spcPts val="1950"/>
-              </a:lnSpc>
-              <a:spcAft>
-                <a:spcPts val="0"/>
-              </a:spcAft>
-              <a:buNone/>
-            </a:pPr>
-            <a:r>
-              <a:rPr lang="en-US" sz="1500" b="0">
-                <a:solidFill>
-                  <a:srgbClr val="202B33"/>
-                </a:solidFill>
-                <a:latin typeface="Arial"/>
-                <a:ea typeface="Arial"/>
-                <a:cs typeface="Arial"/>
-              </a:rPr>
-              <a:t xml:space="preserve">system-rank correlations above point nine</a:t>
-            </a:r>
-            <a:endParaRPr lang="en-US" sz="1500"/>
-          </a:p>
-          <a:p>
-            <a:pPr marL="0" indent="0">
-              <a:lnSpc>
-                <a:spcPts val="1950"/>
-              </a:lnSpc>
-              <a:spcAft>
-                <a:spcPts val="0"/>
-              </a:spcAft>
-              <a:buNone/>
-            </a:pPr>
-            <a:r>
-              <a:rPr lang="en-US" sz="1500" b="0">
-                <a:solidFill>
-                  <a:srgbClr val="202B33"/>
-                </a:solidFill>
-                <a:latin typeface="Arial"/>
-                <a:ea typeface="Arial"/>
-                <a:cs typeface="Arial"/>
-              </a:rPr>
-              <a:t xml:space="preserve">nine. Deep, diverse pools had held up.</a:t>
+              <a:t xml:space="preserve">recheck, Voorhees, Soboroff, and Lin added</a:t>
+            </a:r>
+            <a:endParaRPr lang="en-US" sz="1500"/>
+          </a:p>
+          <a:p>
+            <a:pPr marL="0" indent="0">
+              <a:lnSpc>
+                <a:spcPts val="1950"/>
+              </a:lnSpc>
+              <a:spcAft>
+                <a:spcPts val="0"/>
+              </a:spcAft>
+              <a:buNone/>
+            </a:pPr>
+            <a:r>
+              <a:rPr lang="en-US" sz="1500" b="0">
+                <a:solidFill>
+                  <a:srgbClr val="202B33"/>
+                </a:solidFill>
+                <a:latin typeface="Arial"/>
+                <a:ea typeface="Arial"/>
+                <a:cs typeface="Arial"/>
+              </a:rPr>
+              <a:t xml:space="preserve">judgments to TREC-8 and compared how the</a:t>
+            </a:r>
+            <a:endParaRPr lang="en-US" sz="1500"/>
+          </a:p>
+          <a:p>
+            <a:pPr marL="0" indent="0">
+              <a:lnSpc>
+                <a:spcPts val="1950"/>
+              </a:lnSpc>
+              <a:spcAft>
+                <a:spcPts val="0"/>
+              </a:spcAft>
+              <a:buNone/>
+            </a:pPr>
+            <a:r>
+              <a:rPr lang="en-US" sz="1500" b="0">
+                <a:solidFill>
+                  <a:srgbClr val="202B33"/>
+                </a:solidFill>
+                <a:latin typeface="Arial"/>
+                <a:ea typeface="Arial"/>
+                <a:cs typeface="Arial"/>
+              </a:rPr>
+              <a:t xml:space="preserve">systems ranked before and after. The</a:t>
+            </a:r>
+            <a:endParaRPr lang="en-US" sz="1500"/>
+          </a:p>
+          <a:p>
+            <a:pPr marL="0" indent="0">
+              <a:lnSpc>
+                <a:spcPts val="1950"/>
+              </a:lnSpc>
+              <a:spcAft>
+                <a:spcPts val="0"/>
+              </a:spcAft>
+              <a:buNone/>
+            </a:pPr>
+            <a:r>
+              <a:rPr lang="en-US" sz="1500" b="0">
+                <a:solidFill>
+                  <a:srgbClr val="202B33"/>
+                </a:solidFill>
+                <a:latin typeface="Arial"/>
+                <a:ea typeface="Arial"/>
+                <a:cs typeface="Arial"/>
+              </a:rPr>
+              <a:t xml:space="preserve">ordering barely moved. Deep, diverse pools</a:t>
+            </a:r>
+            <a:endParaRPr lang="en-US" sz="1500"/>
+          </a:p>
+          <a:p>
+            <a:pPr marL="0" indent="0">
+              <a:lnSpc>
+                <a:spcPts val="1950"/>
+              </a:lnSpc>
+              <a:spcAft>
+                <a:spcPts val="0"/>
+              </a:spcAft>
+              <a:buNone/>
+            </a:pPr>
+            <a:r>
+              <a:rPr lang="en-US" sz="1500" b="0">
+                <a:solidFill>
+                  <a:srgbClr val="202B33"/>
+                </a:solidFill>
+                <a:latin typeface="Arial"/>
+                <a:ea typeface="Arial"/>
+                <a:cs typeface="Arial"/>
+              </a:rPr>
+              <a:t xml:space="preserve">had held up.</a:t>
             </a:r>
             <a:endParaRPr lang="en-US" sz="1500"/>
           </a:p>
@@ -10780,7 +10803,7 @@
                 <a:ea typeface="Arial"/>
                 <a:cs typeface="Arial"/>
               </a:rPr>
-              <a:t xml:space="preserve">What changed: the next reader is a generator</a:t>
+              <a:t xml:space="preserve">The Reader Stopped Being a Person</a:t>
             </a:r>
             <a:endParaRPr lang="en-US" sz="2550"/>
           </a:p>
@@ -11109,29 +11132,6 @@
             </a:r>
             <a:endParaRPr lang="en-US" sz="1500"/>
           </a:p>
-          <a:p>
-            <a:pPr marL="0" indent="0">
-              <a:lnSpc>
-                <a:spcPts val="1950"/>
-              </a:lnSpc>
-              <a:spcAft>
-                <a:spcPts val="0"/>
-              </a:spcAft>
-              <a:buNone/>
-            </a:pPr>
-            <a:r>
-              <a:rPr lang="en-US" sz="1500" b="0">
-                <a:solidFill>
-                  <a:srgbClr val="202B33"/>
-                </a:solidFill>
-                <a:latin typeface="Arial"/>
-                <a:ea typeface="Arial"/>
-                <a:cs typeface="Arial"/>
-              </a:rPr>
-              <a:t xml:space="preserve">into that system. We cannot infer that it</a:t>
-            </a:r>
-            <a:endParaRPr lang="en-US" sz="1500"/>
-          </a:p>
         </p:txBody>
       </p:sp>
       <p:sp>
@@ -11177,6 +11177,29 @@
                 <a:ea typeface="Arial"/>
                 <a:cs typeface="Arial"/>
               </a:rPr>
+              <a:t xml:space="preserve">into that system. We cannot infer that it</a:t>
+            </a:r>
+            <a:endParaRPr lang="en-US" sz="1500"/>
+          </a:p>
+          <a:p>
+            <a:pPr marL="0" indent="0">
+              <a:lnSpc>
+                <a:spcPts val="1950"/>
+              </a:lnSpc>
+              <a:spcAft>
+                <a:spcPts val="0"/>
+              </a:spcAft>
+              <a:buNone/>
+            </a:pPr>
+            <a:r>
+              <a:rPr lang="en-US" sz="1500" b="0">
+                <a:solidFill>
+                  <a:srgbClr val="202B33"/>
+                </a:solidFill>
+                <a:latin typeface="Arial"/>
+                <a:ea typeface="Arial"/>
+                <a:cs typeface="Arial"/>
+              </a:rPr>
               <a:t xml:space="preserve">will use them from a good retrieval score.</a:t>
             </a:r>
             <a:endParaRPr lang="en-US" sz="1500"/>
@@ -11407,76 +11430,7 @@
                 <a:ea typeface="Arial"/>
                 <a:cs typeface="Arial"/>
               </a:rPr>
-              <a:t xml:space="preserve">blaming the nearest model. IR also studied</a:t>
-            </a:r>
-            <a:endParaRPr lang="en-US" sz="1500"/>
-          </a:p>
-          <a:p>
-            <a:pPr marL="0" indent="0">
-              <a:lnSpc>
-                <a:spcPts val="1950"/>
-              </a:lnSpc>
-              <a:spcAft>
-                <a:spcPts val="0"/>
-              </a:spcAft>
-              <a:buNone/>
-            </a:pPr>
-            <a:r>
-              <a:rPr lang="en-US" sz="1500" b="0">
-                <a:solidFill>
-                  <a:srgbClr val="202B33"/>
-                </a:solidFill>
-                <a:latin typeface="Arial"/>
-                <a:ea typeface="Arial"/>
-                <a:cs typeface="Arial"/>
-              </a:rPr>
-              <a:t xml:space="preserve">machine consumers before modern RAG; the</a:t>
-            </a:r>
-            <a:endParaRPr lang="en-US" sz="1500"/>
-          </a:p>
-          <a:p>
-            <a:pPr marL="0" indent="0">
-              <a:lnSpc>
-                <a:spcPts val="1950"/>
-              </a:lnSpc>
-              <a:spcAft>
-                <a:spcPts val="0"/>
-              </a:spcAft>
-              <a:buNone/>
-            </a:pPr>
-            <a:r>
-              <a:rPr lang="en-US" sz="1500" b="0">
-                <a:solidFill>
-                  <a:srgbClr val="202B33"/>
-                </a:solidFill>
-                <a:latin typeface="Arial"/>
-                <a:ea typeface="Arial"/>
-                <a:cs typeface="Arial"/>
-              </a:rPr>
-              <a:t xml:space="preserve">change here is this particular generative</a:t>
-            </a:r>
-            <a:endParaRPr lang="en-US" sz="1500"/>
-          </a:p>
-          <a:p>
-            <a:pPr marL="0" indent="0">
-              <a:lnSpc>
-                <a:spcPts val="1950"/>
-              </a:lnSpc>
-              <a:spcAft>
-                <a:spcPts val="0"/>
-              </a:spcAft>
-              <a:buNone/>
-            </a:pPr>
-            <a:r>
-              <a:rPr lang="en-US" sz="1500" b="0">
-                <a:solidFill>
-                  <a:srgbClr val="202B33"/>
-                </a:solidFill>
-                <a:latin typeface="Arial"/>
-                <a:ea typeface="Arial"/>
-                <a:cs typeface="Arial"/>
-              </a:rPr>
-              <a:t xml:space="preserve">handoff and its failure modes.</a:t>
+              <a:t xml:space="preserve">blaming the nearest model.</a:t>
             </a:r>
             <a:endParaRPr lang="en-US" sz="1500"/>
           </a:p>
@@ -12748,53 +12702,7 @@
                 <a:ea typeface="Arial"/>
                 <a:cs typeface="Arial"/>
               </a:rPr>
-              <a:t xml:space="preserve">This was working software, not a cautionary</a:t>
-            </a:r>
-            <a:endParaRPr lang="en-US" sz="1500"/>
-          </a:p>
-          <a:p>
-            <a:pPr marL="0" indent="0">
-              <a:lnSpc>
-                <a:spcPts val="1950"/>
-              </a:lnSpc>
-              <a:spcAft>
-                <a:spcPts val="0"/>
-              </a:spcAft>
-              <a:buNone/>
-            </a:pPr>
-            <a:r>
-              <a:rPr lang="en-US" sz="1500" b="0">
-                <a:solidFill>
-                  <a:srgbClr val="202B33"/>
-                </a:solidFill>
-                <a:latin typeface="Arial"/>
-                <a:ea typeface="Arial"/>
-                <a:cs typeface="Arial"/>
-              </a:rPr>
-              <a:t xml:space="preserve">fable about people foolish enough to use</a:t>
-            </a:r>
-            <a:endParaRPr lang="en-US" sz="1500"/>
-          </a:p>
-          <a:p>
-            <a:pPr marL="0" indent="0">
-              <a:lnSpc>
-                <a:spcPts val="1950"/>
-              </a:lnSpc>
-              <a:spcAft>
-                <a:spcPts val="0"/>
-              </a:spcAft>
-              <a:buNone/>
-            </a:pPr>
-            <a:r>
-              <a:rPr lang="en-US" sz="1500" b="0">
-                <a:solidFill>
-                  <a:srgbClr val="202B33"/>
-                </a:solidFill>
-                <a:latin typeface="Arial"/>
-                <a:ea typeface="Arial"/>
-                <a:cs typeface="Arial"/>
-              </a:rPr>
-              <a:t xml:space="preserve">rules.</a:t>
+              <a:t xml:space="preserve">This was working software.</a:t>
             </a:r>
             <a:endParaRPr lang="en-US" sz="1500"/>
           </a:p>
@@ -12864,6 +12772,29 @@
                 <a:cs typeface="Arial"/>
               </a:rPr>
               <a:t xml:space="preserve">maintains the domain knowledge. Our</a:t>
+            </a:r>
+            <a:endParaRPr lang="en-US" sz="1500"/>
+          </a:p>
+          <a:p>
+            <a:pPr marL="0" indent="0">
+              <a:lnSpc>
+                <a:spcPts val="1950"/>
+              </a:lnSpc>
+              <a:spcAft>
+                <a:spcPts val="0"/>
+              </a:spcAft>
+              <a:buNone/>
+            </a:pPr>
+            <a:r>
+              <a:rPr lang="en-US" sz="1500" b="0">
+                <a:solidFill>
+                  <a:srgbClr val="202B33"/>
+                </a:solidFill>
+                <a:latin typeface="Arial"/>
+                <a:ea typeface="Arial"/>
+                <a:cs typeface="Arial"/>
+              </a:rPr>
+              <a:t xml:space="preserve">retrieved policies and signed schedules</a:t>
             </a:r>
             <a:endParaRPr lang="en-US" sz="1500"/>
           </a:p>
@@ -12893,29 +12824,6 @@
             <a:noAutofit/>
           </a:bodyPr>
           <a:lstStyle/>
-          <a:p>
-            <a:pPr marL="0" indent="0">
-              <a:lnSpc>
-                <a:spcPts val="1950"/>
-              </a:lnSpc>
-              <a:spcAft>
-                <a:spcPts val="0"/>
-              </a:spcAft>
-              <a:buNone/>
-            </a:pPr>
-            <a:r>
-              <a:rPr lang="en-US" sz="1500" b="0">
-                <a:solidFill>
-                  <a:srgbClr val="202B33"/>
-                </a:solidFill>
-                <a:latin typeface="Arial"/>
-                <a:ea typeface="Arial"/>
-                <a:cs typeface="Arial"/>
-              </a:rPr>
-              <a:t xml:space="preserve">retrieved policies and signed schedules</a:t>
-            </a:r>
-            <a:endParaRPr lang="en-US" sz="1500"/>
-          </a:p>
           <a:p>
             <a:pPr marL="0" indent="0">
               <a:lnSpc>
@@ -13443,30 +13351,30 @@
                 <a:ea typeface="Arial"/>
                 <a:cs typeface="Arial"/>
               </a:rPr>
-              <a:t xml:space="preserve">Three search methods in a fundable</a:t>
-            </a:r>
-            <a:endParaRPr lang="en-US" sz="1500"/>
-          </a:p>
-          <a:p>
-            <a:pPr marL="0" indent="0">
-              <a:lnSpc>
-                <a:spcPts val="1950"/>
-              </a:lnSpc>
-              <a:spcAft>
-                <a:spcPts val="0"/>
-              </a:spcAft>
-              <a:buNone/>
-            </a:pPr>
-            <a:r>
-              <a:rPr lang="en-US" sz="1500" b="0">
-                <a:solidFill>
-                  <a:srgbClr val="202B33"/>
-                </a:solidFill>
-                <a:latin typeface="Arial"/>
-                <a:ea typeface="Arial"/>
-                <a:cs typeface="Arial"/>
-              </a:rPr>
-              <a:t xml:space="preserve">trenchcoat.</a:t>
+              <a:t xml:space="preserve">Three search methods. One instrument nobody</a:t>
+            </a:r>
+            <a:endParaRPr lang="en-US" sz="1500"/>
+          </a:p>
+          <a:p>
+            <a:pPr marL="0" indent="0">
+              <a:lnSpc>
+                <a:spcPts val="1950"/>
+              </a:lnSpc>
+              <a:spcAft>
+                <a:spcPts val="0"/>
+              </a:spcAft>
+              <a:buNone/>
+            </a:pPr>
+            <a:r>
+              <a:rPr lang="en-US" sz="1500" b="0">
+                <a:solidFill>
+                  <a:srgbClr val="202B33"/>
+                </a:solidFill>
+                <a:latin typeface="Arial"/>
+                <a:ea typeface="Arial"/>
+                <a:cs typeface="Arial"/>
+              </a:rPr>
+              <a:t xml:space="preserve">checked.</a:t>
             </a:r>
             <a:endParaRPr lang="en-US" sz="1500"/>
           </a:p>
@@ -13674,6 +13582,52 @@
                 <a:cs typeface="Arial"/>
               </a:rPr>
               <a:t xml:space="preserve">Those words tell us why rare identifiers</a:t>
+            </a:r>
+            <a:endParaRPr lang="en-US" sz="1500"/>
+          </a:p>
+          <a:p>
+            <a:pPr marL="0" indent="0">
+              <a:lnSpc>
+                <a:spcPts val="1950"/>
+              </a:lnSpc>
+              <a:spcAft>
+                <a:spcPts val="0"/>
+              </a:spcAft>
+              <a:buNone/>
+            </a:pPr>
+            <a:r>
+              <a:rPr lang="en-US" sz="1500" b="0">
+                <a:solidFill>
+                  <a:srgbClr val="202B33"/>
+                </a:solidFill>
+                <a:latin typeface="Arial"/>
+                <a:ea typeface="Arial"/>
+                <a:cs typeface="Arial"/>
+              </a:rPr>
+              <a:t xml:space="preserve">matter, why synonyms are hard, why a</a:t>
+            </a:r>
+            <a:endParaRPr lang="en-US" sz="1500"/>
+          </a:p>
+          <a:p>
+            <a:pPr marL="0" indent="0">
+              <a:lnSpc>
+                <a:spcPts val="1950"/>
+              </a:lnSpc>
+              <a:spcAft>
+                <a:spcPts val="0"/>
+              </a:spcAft>
+              <a:buNone/>
+            </a:pPr>
+            <a:r>
+              <a:rPr lang="en-US" sz="1500" b="0">
+                <a:solidFill>
+                  <a:srgbClr val="202B33"/>
+                </a:solidFill>
+                <a:latin typeface="Arial"/>
+                <a:ea typeface="Arial"/>
+                <a:cs typeface="Arial"/>
+              </a:rPr>
+              <a:t xml:space="preserve">passage needs its exception, and why the</a:t>
             </a:r>
             <a:endParaRPr lang="en-US" sz="1500"/>
           </a:p>
@@ -13722,52 +13676,6 @@
                 <a:ea typeface="Arial"/>
                 <a:cs typeface="Arial"/>
               </a:rPr>
-              <a:t xml:space="preserve">matter, why synonyms are hard, why a</a:t>
-            </a:r>
-            <a:endParaRPr lang="en-US" sz="1500"/>
-          </a:p>
-          <a:p>
-            <a:pPr marL="0" indent="0">
-              <a:lnSpc>
-                <a:spcPts val="1950"/>
-              </a:lnSpc>
-              <a:spcAft>
-                <a:spcPts val="0"/>
-              </a:spcAft>
-              <a:buNone/>
-            </a:pPr>
-            <a:r>
-              <a:rPr lang="en-US" sz="1500" b="0">
-                <a:solidFill>
-                  <a:srgbClr val="202B33"/>
-                </a:solidFill>
-                <a:latin typeface="Arial"/>
-                <a:ea typeface="Arial"/>
-                <a:cs typeface="Arial"/>
-              </a:rPr>
-              <a:t xml:space="preserve">passage needs its exception, and why the</a:t>
-            </a:r>
-            <a:endParaRPr lang="en-US" sz="1500"/>
-          </a:p>
-          <a:p>
-            <a:pPr marL="0" indent="0">
-              <a:lnSpc>
-                <a:spcPts val="1950"/>
-              </a:lnSpc>
-              <a:spcAft>
-                <a:spcPts val="0"/>
-              </a:spcAft>
-              <a:buNone/>
-            </a:pPr>
-            <a:r>
-              <a:rPr lang="en-US" sz="1500" b="0">
-                <a:solidFill>
-                  <a:srgbClr val="202B33"/>
-                </a:solidFill>
-                <a:latin typeface="Arial"/>
-                <a:ea typeface="Arial"/>
-                <a:cs typeface="Arial"/>
-              </a:rPr>
               <a:t xml:space="preserve">score depends on who judged which</a:t>
             </a:r>
             <a:endParaRPr lang="en-US" sz="1500"/>
@@ -13860,99 +13768,168 @@
                 <a:ea typeface="Arial"/>
                 <a:cs typeface="Arial"/>
               </a:rPr>
-              <a:t xml:space="preserve">Sixty years since the Cranfield report. The</a:t>
-            </a:r>
-            <a:endParaRPr lang="en-US" sz="1500"/>
-          </a:p>
-          <a:p>
-            <a:pPr marL="0" indent="0">
-              <a:lnSpc>
-                <a:spcPts val="1950"/>
-              </a:lnSpc>
-              <a:spcAft>
-                <a:spcPts val="0"/>
-              </a:spcAft>
-              <a:buNone/>
-            </a:pPr>
-            <a:r>
-              <a:rPr lang="en-US" sz="1500" b="0">
-                <a:solidFill>
-                  <a:srgbClr val="202B33"/>
-                </a:solidFill>
-                <a:latin typeface="Arial"/>
-                <a:ea typeface="Arial"/>
-                <a:cs typeface="Arial"/>
-              </a:rPr>
-              <a:t xml:space="preserve">field did not just build evaluations. It</a:t>
-            </a:r>
-            <a:endParaRPr lang="en-US" sz="1500"/>
-          </a:p>
-          <a:p>
-            <a:pPr marL="0" indent="0">
-              <a:lnSpc>
-                <a:spcPts val="1950"/>
-              </a:lnSpc>
-              <a:spcAft>
-                <a:spcPts val="0"/>
-              </a:spcAft>
-              <a:buNone/>
-            </a:pPr>
-            <a:r>
-              <a:rPr lang="en-US" sz="1500" b="0">
-                <a:solidFill>
-                  <a:srgbClr val="202B33"/>
-                </a:solidFill>
-                <a:latin typeface="Arial"/>
-                <a:ea typeface="Arial"/>
-                <a:cs typeface="Arial"/>
-              </a:rPr>
-              <a:t xml:space="preserve">investigated when they could be trusted. Go</a:t>
-            </a:r>
-            <a:endParaRPr lang="en-US" sz="1500"/>
-          </a:p>
-          <a:p>
-            <a:pPr marL="0" indent="0">
-              <a:lnSpc>
-                <a:spcPts val="1950"/>
-              </a:lnSpc>
-              <a:spcAft>
-                <a:spcPts val="0"/>
-              </a:spcAft>
-              <a:buNone/>
-            </a:pPr>
-            <a:r>
-              <a:rPr lang="en-US" sz="1500" b="0">
-                <a:solidFill>
-                  <a:srgbClr val="202B33"/>
-                </a:solidFill>
-                <a:latin typeface="Arial"/>
-                <a:ea typeface="Arial"/>
-                <a:cs typeface="Arial"/>
-              </a:rPr>
-              <a:t xml:space="preserve">find the documents your eval set never</a:t>
-            </a:r>
-            <a:endParaRPr lang="en-US" sz="1500"/>
-          </a:p>
-          <a:p>
-            <a:pPr marL="0" indent="0">
-              <a:lnSpc>
-                <a:spcPts val="1950"/>
-              </a:lnSpc>
-              <a:spcAft>
-                <a:spcPts val="0"/>
-              </a:spcAft>
-              <a:buNone/>
-            </a:pPr>
-            <a:r>
-              <a:rPr lang="en-US" sz="1500" b="0">
-                <a:solidFill>
-                  <a:srgbClr val="202B33"/>
-                </a:solidFill>
-                <a:latin typeface="Arial"/>
-                <a:ea typeface="Arial"/>
-                <a:cs typeface="Arial"/>
-              </a:rPr>
-              <a:t xml:space="preserve">judged.</a:t>
+              <a:t xml:space="preserve">Three search methods in a fundable</a:t>
+            </a:r>
+            <a:endParaRPr lang="en-US" sz="1500"/>
+          </a:p>
+          <a:p>
+            <a:pPr marL="0" indent="0">
+              <a:lnSpc>
+                <a:spcPts val="1950"/>
+              </a:lnSpc>
+              <a:spcAft>
+                <a:spcPts val="0"/>
+              </a:spcAft>
+              <a:buNone/>
+            </a:pPr>
+            <a:r>
+              <a:rPr lang="en-US" sz="1500" b="0">
+                <a:solidFill>
+                  <a:srgbClr val="202B33"/>
+                </a:solidFill>
+                <a:latin typeface="Arial"/>
+                <a:ea typeface="Arial"/>
+                <a:cs typeface="Arial"/>
+              </a:rPr>
+              <a:t xml:space="preserve">trenchcoat. That is a fair joke about the</a:t>
+            </a:r>
+            <a:endParaRPr lang="en-US" sz="1500"/>
+          </a:p>
+          <a:p>
+            <a:pPr marL="0" indent="0">
+              <a:lnSpc>
+                <a:spcPts val="1950"/>
+              </a:lnSpc>
+              <a:spcAft>
+                <a:spcPts val="0"/>
+              </a:spcAft>
+              <a:buNone/>
+            </a:pPr>
+            <a:r>
+              <a:rPr lang="en-US" sz="1500" b="0">
+                <a:solidFill>
+                  <a:srgbClr val="202B33"/>
+                </a:solidFill>
+                <a:latin typeface="Arial"/>
+                <a:ea typeface="Arial"/>
+                <a:cs typeface="Arial"/>
+              </a:rPr>
+              <a:t xml:space="preserve">retriever, and the coat is not the problem.</a:t>
+            </a:r>
+            <a:endParaRPr lang="en-US" sz="1500"/>
+          </a:p>
+          <a:p>
+            <a:pPr marL="0" indent="0">
+              <a:lnSpc>
+                <a:spcPts val="1950"/>
+              </a:lnSpc>
+              <a:spcAft>
+                <a:spcPts val="0"/>
+              </a:spcAft>
+              <a:buNone/>
+            </a:pPr>
+            <a:r>
+              <a:rPr lang="en-US" sz="1500" b="0">
+                <a:solidFill>
+                  <a:srgbClr val="202B33"/>
+                </a:solidFill>
+                <a:latin typeface="Arial"/>
+                <a:ea typeface="Arial"/>
+                <a:cs typeface="Arial"/>
+              </a:rPr>
+              <a:t xml:space="preserve">Lexical, dense, hybrid: we inherited all</a:t>
+            </a:r>
+            <a:endParaRPr lang="en-US" sz="1500"/>
+          </a:p>
+          <a:p>
+            <a:pPr marL="0" indent="0">
+              <a:lnSpc>
+                <a:spcPts val="1950"/>
+              </a:lnSpc>
+              <a:spcAft>
+                <a:spcPts val="0"/>
+              </a:spcAft>
+              <a:buNone/>
+            </a:pPr>
+            <a:r>
+              <a:rPr lang="en-US" sz="1500" b="0">
+                <a:solidFill>
+                  <a:srgbClr val="202B33"/>
+                </a:solidFill>
+                <a:latin typeface="Arial"/>
+                <a:ea typeface="Arial"/>
+                <a:cs typeface="Arial"/>
+              </a:rPr>
+              <a:t xml:space="preserve">three. What we left behind was the sixty</a:t>
+            </a:r>
+            <a:endParaRPr lang="en-US" sz="1500"/>
+          </a:p>
+          <a:p>
+            <a:pPr marL="0" indent="0">
+              <a:lnSpc>
+                <a:spcPts val="1950"/>
+              </a:lnSpc>
+              <a:spcAft>
+                <a:spcPts val="0"/>
+              </a:spcAft>
+              <a:buNone/>
+            </a:pPr>
+            <a:r>
+              <a:rPr lang="en-US" sz="1500" b="0">
+                <a:solidFill>
+                  <a:srgbClr val="202B33"/>
+                </a:solidFill>
+                <a:latin typeface="Arial"/>
+                <a:ea typeface="Arial"/>
+                <a:cs typeface="Arial"/>
+              </a:rPr>
+              <a:t xml:space="preserve">years of checking whether the score</a:t>
+            </a:r>
+            <a:endParaRPr lang="en-US" sz="1500"/>
+          </a:p>
+          <a:p>
+            <a:pPr marL="0" indent="0">
+              <a:lnSpc>
+                <a:spcPts val="1950"/>
+              </a:lnSpc>
+              <a:spcAft>
+                <a:spcPts val="0"/>
+              </a:spcAft>
+              <a:buNone/>
+            </a:pPr>
+            <a:r>
+              <a:rPr lang="en-US" sz="1500" b="0">
+                <a:solidFill>
+                  <a:srgbClr val="202B33"/>
+                </a:solidFill>
+                <a:latin typeface="Arial"/>
+                <a:ea typeface="Arial"/>
+                <a:cs typeface="Arial"/>
+              </a:rPr>
+              <a:t xml:space="preserve">underneath was telling the truth. Go find</a:t>
+            </a:r>
+            <a:endParaRPr lang="en-US" sz="1500"/>
+          </a:p>
+          <a:p>
+            <a:pPr marL="0" indent="0">
+              <a:lnSpc>
+                <a:spcPts val="1950"/>
+              </a:lnSpc>
+              <a:spcAft>
+                <a:spcPts val="0"/>
+              </a:spcAft>
+              <a:buNone/>
+            </a:pPr>
+            <a:r>
+              <a:rPr lang="en-US" sz="1500" b="0">
+                <a:solidFill>
+                  <a:srgbClr val="202B33"/>
+                </a:solidFill>
+                <a:latin typeface="Arial"/>
+                <a:ea typeface="Arial"/>
+                <a:cs typeface="Arial"/>
+              </a:rPr>
+              <a:t xml:space="preserve">the documents your eval set never judged.</a:t>
             </a:r>
             <a:endParaRPr lang="en-US" sz="1500"/>
           </a:p>
@@ -14230,7 +14207,7 @@
                 <a:ea typeface="Arial"/>
                 <a:cs typeface="Arial"/>
               </a:rPr>
-              <a:t xml:space="preserve">Karen Sparck Jones (1972), A statistical</a:t>
+              <a:t xml:space="preserve">Karen Spärck Jones (1972), A statistical</a:t>
             </a:r>
             <a:endParaRPr lang="en-US" sz="1500"/>
           </a:p>
@@ -15711,29 +15688,6 @@
             </a:r>
             <a:endParaRPr lang="en-US" sz="1500"/>
           </a:p>
-          <a:p>
-            <a:pPr marL="0" indent="0">
-              <a:lnSpc>
-                <a:spcPts val="1950"/>
-              </a:lnSpc>
-              <a:spcAft>
-                <a:spcPts val="0"/>
-              </a:spcAft>
-              <a:buNone/>
-            </a:pPr>
-            <a:r>
-              <a:rPr lang="en-US" sz="1500" b="0">
-                <a:solidFill>
-                  <a:srgbClr val="202B33"/>
-                </a:solidFill>
-                <a:latin typeface="Arial"/>
-                <a:ea typeface="Arial"/>
-                <a:cs typeface="Arial"/>
-              </a:rPr>
-              <a:t xml:space="preserve">Ellen M. Voorhees (2000), Variations in</a:t>
-            </a:r>
-            <a:endParaRPr lang="en-US" sz="1500"/>
-          </a:p>
         </p:txBody>
       </p:sp>
       <p:sp>
@@ -15779,6 +15733,29 @@
                 <a:ea typeface="Arial"/>
                 <a:cs typeface="Arial"/>
               </a:rPr>
+              <a:t xml:space="preserve">Ellen M. Voorhees (2000), Variations in</a:t>
+            </a:r>
+            <a:endParaRPr lang="en-US" sz="1500"/>
+          </a:p>
+          <a:p>
+            <a:pPr marL="0" indent="0">
+              <a:lnSpc>
+                <a:spcPts val="1950"/>
+              </a:lnSpc>
+              <a:spcAft>
+                <a:spcPts val="0"/>
+              </a:spcAft>
+              <a:buNone/>
+            </a:pPr>
+            <a:r>
+              <a:rPr lang="en-US" sz="1500" b="0">
+                <a:solidFill>
+                  <a:srgbClr val="202B33"/>
+                </a:solidFill>
+                <a:latin typeface="Arial"/>
+                <a:ea typeface="Arial"/>
+                <a:cs typeface="Arial"/>
+              </a:rPr>
               <a:t xml:space="preserve">Relevance Judgments and the Measurement of</a:t>
             </a:r>
             <a:endParaRPr lang="en-US" sz="1500"/>
@@ -15986,76 +15963,7 @@
                 <a:ea typeface="Arial"/>
                 <a:cs typeface="Arial"/>
               </a:rPr>
-              <a:t xml:space="preserve">Artificial Intelligence 19(1, 39–88. The</a:t>
-            </a:r>
-            <a:endParaRPr lang="en-US" sz="1500"/>
-          </a:p>
-          <a:p>
-            <a:pPr marL="0" indent="0">
-              <a:lnSpc>
-                <a:spcPts val="1950"/>
-              </a:lnSpc>
-              <a:spcAft>
-                <a:spcPts val="0"/>
-              </a:spcAft>
-              <a:buNone/>
-            </a:pPr>
-            <a:r>
-              <a:rPr lang="en-US" sz="1500" b="0">
-                <a:solidFill>
-                  <a:srgbClr val="202B33"/>
-                </a:solidFill>
-                <a:latin typeface="Arial"/>
-                <a:ea typeface="Arial"/>
-                <a:cs typeface="Arial"/>
-              </a:rPr>
-              <a:t xml:space="preserve">maintenance application is the speaker’s</a:t>
-            </a:r>
-            <a:endParaRPr lang="en-US" sz="1500"/>
-          </a:p>
-          <a:p>
-            <a:pPr marL="0" indent="0">
-              <a:lnSpc>
-                <a:spcPts val="1950"/>
-              </a:lnSpc>
-              <a:spcAft>
-                <a:spcPts val="0"/>
-              </a:spcAft>
-              <a:buNone/>
-            </a:pPr>
-            <a:r>
-              <a:rPr lang="en-US" sz="1500" b="0">
-                <a:solidFill>
-                  <a:srgbClr val="202B33"/>
-                </a:solidFill>
-                <a:latin typeface="Arial"/>
-                <a:ea typeface="Arial"/>
-                <a:cs typeface="Arial"/>
-              </a:rPr>
-              <a:t xml:space="preserve">argument, not a claim that this paper</a:t>
-            </a:r>
-            <a:endParaRPr lang="en-US" sz="1500"/>
-          </a:p>
-          <a:p>
-            <a:pPr marL="0" indent="0">
-              <a:lnSpc>
-                <a:spcPts val="1950"/>
-              </a:lnSpc>
-              <a:spcAft>
-                <a:spcPts val="0"/>
-              </a:spcAft>
-              <a:buNone/>
-            </a:pPr>
-            <a:r>
-              <a:rPr lang="en-US" sz="1500" b="0">
-                <a:solidFill>
-                  <a:srgbClr val="202B33"/>
-                </a:solidFill>
-                <a:latin typeface="Arial"/>
-                <a:ea typeface="Arial"/>
-                <a:cs typeface="Arial"/>
-              </a:rPr>
-              <a:t xml:space="preserve">explains the industry’s decline.</a:t>
+              <a:t xml:space="preserve">Artificial Intelligence 19(1, 39–88.</a:t>
             </a:r>
             <a:endParaRPr lang="en-US" sz="1500"/>
           </a:p>
@@ -17953,7 +17861,7 @@
                 <a:ea typeface="Arial"/>
                 <a:cs typeface="Arial"/>
               </a:rPr>
-              <a:t xml:space="preserve">Karen Sparck Jones · term specificity</a:t>
+              <a:t xml:space="preserve">Karen Spärck Jones · term specificity</a:t>
             </a:r>
             <a:endParaRPr lang="en-US" sz="1500"/>
           </a:p>
@@ -18045,7 +17953,7 @@
                 <a:ea typeface="Arial"/>
                 <a:cs typeface="Arial"/>
               </a:rPr>
-              <a:t xml:space="preserve">Karen Sparck Jones published a statistical</a:t>
+              <a:t xml:space="preserve">Karen Spärck Jones published a statistical</a:t>
             </a:r>
             <a:endParaRPr lang="en-US" sz="1500"/>
           </a:p>
@@ -18184,29 +18092,6 @@
                 <a:cs typeface="Arial"/>
               </a:rPr>
               <a:t xml:space="preserve">Think of an error code in a support query.</a:t>
-            </a:r>
-            <a:endParaRPr lang="en-US" sz="1500"/>
-          </a:p>
-          <a:p>
-            <a:pPr marL="0" indent="0">
-              <a:lnSpc>
-                <a:spcPts val="1950"/>
-              </a:lnSpc>
-              <a:spcAft>
-                <a:spcPts val="0"/>
-              </a:spcAft>
-              <a:buNone/>
-            </a:pPr>
-            <a:r>
-              <a:rPr lang="en-US" sz="1500" b="0">
-                <a:solidFill>
-                  <a:srgbClr val="202B33"/>
-                </a:solidFill>
-                <a:latin typeface="Arial"/>
-                <a:ea typeface="Arial"/>
-                <a:cs typeface="Arial"/>
-              </a:rPr>
-              <a:t xml:space="preserve">The words "application error" occur</a:t>
             </a:r>
             <a:endParaRPr lang="en-US" sz="1500"/>
           </a:p>
@@ -18255,6 +18140,29 @@
                 <a:ea typeface="Arial"/>
                 <a:cs typeface="Arial"/>
               </a:rPr>
+              <a:t xml:space="preserve">The words "application error" occur</a:t>
+            </a:r>
+            <a:endParaRPr lang="en-US" sz="1500"/>
+          </a:p>
+          <a:p>
+            <a:pPr marL="0" indent="0">
+              <a:lnSpc>
+                <a:spcPts val="1950"/>
+              </a:lnSpc>
+              <a:spcAft>
+                <a:spcPts val="0"/>
+              </a:spcAft>
+              <a:buNone/>
+            </a:pPr>
+            <a:r>
+              <a:rPr lang="en-US" sz="1500" b="0">
+                <a:solidFill>
+                  <a:srgbClr val="202B33"/>
+                </a:solidFill>
+                <a:latin typeface="Arial"/>
+                <a:ea typeface="Arial"/>
+                <a:cs typeface="Arial"/>
+              </a:rPr>
               <a:t xml:space="preserve">everywhere. The exact identifier narrows</a:t>
             </a:r>
             <a:endParaRPr lang="en-US" sz="1500"/>
@@ -18393,76 +18301,30 @@
                 <a:ea typeface="Arial"/>
                 <a:cs typeface="Arial"/>
               </a:rPr>
-              <a:t xml:space="preserve">her name on the slide. The point is not</a:t>
-            </a:r>
-            <a:endParaRPr lang="en-US" sz="1500"/>
-          </a:p>
-          <a:p>
-            <a:pPr marL="0" indent="0">
-              <a:lnSpc>
-                <a:spcPts val="1950"/>
-              </a:lnSpc>
-              <a:spcAft>
-                <a:spcPts val="0"/>
-              </a:spcAft>
-              <a:buNone/>
-            </a:pPr>
-            <a:r>
-              <a:rPr lang="en-US" sz="1500" b="0">
-                <a:solidFill>
-                  <a:srgbClr val="202B33"/>
-                </a:solidFill>
-                <a:latin typeface="Arial"/>
-                <a:ea typeface="Arial"/>
-                <a:cs typeface="Arial"/>
-              </a:rPr>
-              <a:t xml:space="preserve">that every rare word is relevant. A typo</a:t>
-            </a:r>
-            <a:endParaRPr lang="en-US" sz="1500"/>
-          </a:p>
-          <a:p>
-            <a:pPr marL="0" indent="0">
-              <a:lnSpc>
-                <a:spcPts val="1950"/>
-              </a:lnSpc>
-              <a:spcAft>
-                <a:spcPts val="0"/>
-              </a:spcAft>
-              <a:buNone/>
-            </a:pPr>
-            <a:r>
-              <a:rPr lang="en-US" sz="1500" b="0">
-                <a:solidFill>
-                  <a:srgbClr val="202B33"/>
-                </a:solidFill>
-                <a:latin typeface="Arial"/>
-                <a:ea typeface="Arial"/>
-                <a:cs typeface="Arial"/>
-              </a:rPr>
-              <a:t xml:space="preserve">can be rare. The point is that corpus</a:t>
-            </a:r>
-            <a:endParaRPr lang="en-US" sz="1500"/>
-          </a:p>
-          <a:p>
-            <a:pPr marL="0" indent="0">
-              <a:lnSpc>
-                <a:spcPts val="1950"/>
-              </a:lnSpc>
-              <a:spcAft>
-                <a:spcPts val="0"/>
-              </a:spcAft>
-              <a:buNone/>
-            </a:pPr>
-            <a:r>
-              <a:rPr lang="en-US" sz="1500" b="0">
-                <a:solidFill>
-                  <a:srgbClr val="202B33"/>
-                </a:solidFill>
-                <a:latin typeface="Arial"/>
-                <a:ea typeface="Arial"/>
-                <a:cs typeface="Arial"/>
-              </a:rPr>
-              <a:t xml:space="preserve">frequency supplies evidence, and the</a:t>
+              <a:t xml:space="preserve">her name on the slide. The point is that</a:t>
+            </a:r>
+            <a:endParaRPr lang="en-US" sz="1500"/>
+          </a:p>
+          <a:p>
+            <a:pPr marL="0" indent="0">
+              <a:lnSpc>
+                <a:spcPts val="1950"/>
+              </a:lnSpc>
+              <a:spcAft>
+                <a:spcPts val="0"/>
+              </a:spcAft>
+              <a:buNone/>
+            </a:pPr>
+            <a:r>
+              <a:rPr lang="en-US" sz="1500" b="0">
+                <a:solidFill>
+                  <a:srgbClr val="202B33"/>
+                </a:solidFill>
+                <a:latin typeface="Arial"/>
+                <a:ea typeface="Arial"/>
+                <a:cs typeface="Arial"/>
+              </a:rPr>
+              <a:t xml:space="preserve">corpus frequency supplies evidence, and the</a:t>
             </a:r>
             <a:endParaRPr lang="en-US" sz="1500"/>
           </a:p>
@@ -18737,7 +18599,7 @@
                 <a:ea typeface="Arial"/>
                 <a:cs typeface="Arial"/>
               </a:rPr>
-              <a:t xml:space="preserve">1975 and 1990: the vector was already there</a:t>
+              <a:t xml:space="preserve">Vector Database, 1975</a:t>
             </a:r>
             <a:endParaRPr lang="en-US" sz="2550"/>
           </a:p>
@@ -20636,7 +20498,76 @@
                 <a:ea typeface="Arial"/>
                 <a:cs typeface="Arial"/>
               </a:rPr>
-              <a:t xml:space="preserve">approaches in 1993.</a:t>
+              <a:t xml:space="preserve">approaches in 1993. Chunk size was an open</a:t>
+            </a:r>
+            <a:endParaRPr lang="en-US" sz="1500"/>
+          </a:p>
+          <a:p>
+            <a:pPr marL="0" indent="0">
+              <a:lnSpc>
+                <a:spcPts val="1950"/>
+              </a:lnSpc>
+              <a:spcAft>
+                <a:spcPts val="0"/>
+              </a:spcAft>
+              <a:buNone/>
+            </a:pPr>
+            <a:r>
+              <a:rPr lang="en-US" sz="1500" b="0">
+                <a:solidFill>
+                  <a:srgbClr val="202B33"/>
+                </a:solidFill>
+                <a:latin typeface="Arial"/>
+                <a:ea typeface="Arial"/>
+                <a:cs typeface="Arial"/>
+              </a:rPr>
+              <a:t xml:space="preserve">research question in 1993 and a forum</a:t>
+            </a:r>
+            <a:endParaRPr lang="en-US" sz="1500"/>
+          </a:p>
+          <a:p>
+            <a:pPr marL="0" indent="0">
+              <a:lnSpc>
+                <a:spcPts val="1950"/>
+              </a:lnSpc>
+              <a:spcAft>
+                <a:spcPts val="0"/>
+              </a:spcAft>
+              <a:buNone/>
+            </a:pPr>
+            <a:r>
+              <a:rPr lang="en-US" sz="1500" b="0">
+                <a:solidFill>
+                  <a:srgbClr val="202B33"/>
+                </a:solidFill>
+                <a:latin typeface="Arial"/>
+                <a:ea typeface="Arial"/>
+                <a:cs typeface="Arial"/>
+              </a:rPr>
+              <a:t xml:space="preserve">thread in 2024. One of those had a control</a:t>
+            </a:r>
+            <a:endParaRPr lang="en-US" sz="1500"/>
+          </a:p>
+          <a:p>
+            <a:pPr marL="0" indent="0">
+              <a:lnSpc>
+                <a:spcPts val="1950"/>
+              </a:lnSpc>
+              <a:spcAft>
+                <a:spcPts val="0"/>
+              </a:spcAft>
+              <a:buNone/>
+            </a:pPr>
+            <a:r>
+              <a:rPr lang="en-US" sz="1500" b="0">
+                <a:solidFill>
+                  <a:srgbClr val="202B33"/>
+                </a:solidFill>
+                <a:latin typeface="Arial"/>
+                <a:ea typeface="Arial"/>
+                <a:cs typeface="Arial"/>
+              </a:rPr>
+              <a:t xml:space="preserve">group.</a:t>
             </a:r>
             <a:endParaRPr lang="en-US" sz="1500"/>
           </a:p>
@@ -20729,29 +20660,6 @@
                 <a:cs typeface="Arial"/>
               </a:rPr>
               <a:t xml:space="preserve">exception for annual contracts. Split</a:t>
-            </a:r>
-            <a:endParaRPr lang="en-US" sz="1500"/>
-          </a:p>
-          <a:p>
-            <a:pPr marL="0" indent="0">
-              <a:lnSpc>
-                <a:spcPts val="1950"/>
-              </a:lnSpc>
-              <a:spcAft>
-                <a:spcPts val="0"/>
-              </a:spcAft>
-              <a:buNone/>
-            </a:pPr>
-            <a:r>
-              <a:rPr lang="en-US" sz="1500" b="0">
-                <a:solidFill>
-                  <a:srgbClr val="202B33"/>
-                </a:solidFill>
-                <a:latin typeface="Arial"/>
-                <a:ea typeface="Arial"/>
-                <a:cs typeface="Arial"/>
-              </a:rPr>
-              <a:t xml:space="preserve">between those paragraphs and the first</a:t>
             </a:r>
             <a:endParaRPr lang="en-US" sz="1500"/>
           </a:p>
@@ -20781,6 +20689,29 @@
             <a:noAutofit/>
           </a:bodyPr>
           <a:lstStyle/>
+          <a:p>
+            <a:pPr marL="0" indent="0">
+              <a:lnSpc>
+                <a:spcPts val="1950"/>
+              </a:lnSpc>
+              <a:spcAft>
+                <a:spcPts val="0"/>
+              </a:spcAft>
+              <a:buNone/>
+            </a:pPr>
+            <a:r>
+              <a:rPr lang="en-US" sz="1500" b="0">
+                <a:solidFill>
+                  <a:srgbClr val="202B33"/>
+                </a:solidFill>
+                <a:latin typeface="Arial"/>
+                <a:ea typeface="Arial"/>
+                <a:cs typeface="Arial"/>
+              </a:rPr>
+              <a:t xml:space="preserve">between those paragraphs and the first</a:t>
+            </a:r>
+            <a:endParaRPr lang="en-US" sz="1500"/>
+          </a:p>
           <a:p>
             <a:pPr marL="0" indent="0">
               <a:lnSpc>
@@ -21611,6 +21542,29 @@
             </a:r>
             <a:endParaRPr lang="en-US" sz="1500"/>
           </a:p>
+          <a:p>
+            <a:pPr marL="0" indent="0">
+              <a:lnSpc>
+                <a:spcPts val="1950"/>
+              </a:lnSpc>
+              <a:spcAft>
+                <a:spcPts val="0"/>
+              </a:spcAft>
+              <a:buNone/>
+            </a:pPr>
+            <a:r>
+              <a:rPr lang="en-US" sz="1500" b="0">
+                <a:solidFill>
+                  <a:srgbClr val="202B33"/>
+                </a:solidFill>
+                <a:latin typeface="Arial"/>
+                <a:ea typeface="Arial"/>
+                <a:cs typeface="Arial"/>
+              </a:rPr>
+              <a:t xml:space="preserve">claim that BM25 wins in 2026. It is a</a:t>
+            </a:r>
+            <a:endParaRPr lang="en-US" sz="1500"/>
+          </a:p>
         </p:txBody>
       </p:sp>
       <p:sp>
@@ -21656,29 +21610,6 @@
                 <a:ea typeface="Arial"/>
                 <a:cs typeface="Arial"/>
               </a:rPr>
-              <a:t xml:space="preserve">claim that BM25 wins in 2026. It is a</a:t>
-            </a:r>
-            <a:endParaRPr lang="en-US" sz="1500"/>
-          </a:p>
-          <a:p>
-            <a:pPr marL="0" indent="0">
-              <a:lnSpc>
-                <a:spcPts val="1950"/>
-              </a:lnSpc>
-              <a:spcAft>
-                <a:spcPts val="0"/>
-              </a:spcAft>
-              <a:buNone/>
-            </a:pPr>
-            <a:r>
-              <a:rPr lang="en-US" sz="1500" b="0">
-                <a:solidFill>
-                  <a:srgbClr val="202B33"/>
-                </a:solidFill>
-                <a:latin typeface="Arial"/>
-                <a:ea typeface="Arial"/>
-                <a:cs typeface="Arial"/>
-              </a:rPr>
               <a:t xml:space="preserve">reason to include a cheap lexical baseline</a:t>
             </a:r>
             <a:endParaRPr lang="en-US" sz="1500"/>
@@ -21817,76 +21748,145 @@
                 <a:ea typeface="Arial"/>
                 <a:cs typeface="Arial"/>
               </a:rPr>
-              <a:t xml:space="preserve">Run the comparison on the same corpus,</a:t>
-            </a:r>
-            <a:endParaRPr lang="en-US" sz="1500"/>
-          </a:p>
-          <a:p>
-            <a:pPr marL="0" indent="0">
-              <a:lnSpc>
-                <a:spcPts val="1950"/>
-              </a:lnSpc>
-              <a:spcAft>
-                <a:spcPts val="0"/>
-              </a:spcAft>
-              <a:buNone/>
-            </a:pPr>
-            <a:r>
-              <a:rPr lang="en-US" sz="1500" b="0">
-                <a:solidFill>
-                  <a:srgbClr val="202B33"/>
-                </a:solidFill>
-                <a:latin typeface="Arial"/>
-                <a:ea typeface="Arial"/>
-                <a:cs typeface="Arial"/>
-              </a:rPr>
-              <a:t xml:space="preserve">queries, and judgments. Otherwise you have</a:t>
-            </a:r>
-            <a:endParaRPr lang="en-US" sz="1500"/>
-          </a:p>
-          <a:p>
-            <a:pPr marL="0" indent="0">
-              <a:lnSpc>
-                <a:spcPts val="1950"/>
-              </a:lnSpc>
-              <a:spcAft>
-                <a:spcPts val="0"/>
-              </a:spcAft>
-              <a:buNone/>
-            </a:pPr>
-            <a:r>
-              <a:rPr lang="en-US" sz="1500" b="0">
-                <a:solidFill>
-                  <a:srgbClr val="202B33"/>
-                </a:solidFill>
-                <a:latin typeface="Arial"/>
-                <a:ea typeface="Arial"/>
-                <a:cs typeface="Arial"/>
-              </a:rPr>
-              <a:t xml:space="preserve">compared two demonstrations and called the</a:t>
-            </a:r>
-            <a:endParaRPr lang="en-US" sz="1500"/>
-          </a:p>
-          <a:p>
-            <a:pPr marL="0" indent="0">
-              <a:lnSpc>
-                <a:spcPts val="1950"/>
-              </a:lnSpc>
-              <a:spcAft>
-                <a:spcPts val="0"/>
-              </a:spcAft>
-              <a:buNone/>
-            </a:pPr>
-            <a:r>
-              <a:rPr lang="en-US" sz="1500" b="0">
-                <a:solidFill>
-                  <a:srgbClr val="202B33"/>
-                </a:solidFill>
-                <a:latin typeface="Arial"/>
-                <a:ea typeface="Arial"/>
-                <a:cs typeface="Arial"/>
-              </a:rPr>
-              <a:t xml:space="preserve">difference a model improvement.</a:t>
+              <a:t xml:space="preserve">Lexical, dense, hybrid. Those are the three</a:t>
+            </a:r>
+            <a:endParaRPr lang="en-US" sz="1500"/>
+          </a:p>
+          <a:p>
+            <a:pPr marL="0" indent="0">
+              <a:lnSpc>
+                <a:spcPts val="1950"/>
+              </a:lnSpc>
+              <a:spcAft>
+                <a:spcPts val="0"/>
+              </a:spcAft>
+              <a:buNone/>
+            </a:pPr>
+            <a:r>
+              <a:rPr lang="en-US" sz="1500" b="0">
+                <a:solidFill>
+                  <a:srgbClr val="202B33"/>
+                </a:solidFill>
+                <a:latin typeface="Arial"/>
+                <a:ea typeface="Arial"/>
+                <a:cs typeface="Arial"/>
+              </a:rPr>
+              <a:t xml:space="preserve">search methods in the trenchcoat, and the</a:t>
+            </a:r>
+            <a:endParaRPr lang="en-US" sz="1500"/>
+          </a:p>
+          <a:p>
+            <a:pPr marL="0" indent="0">
+              <a:lnSpc>
+                <a:spcPts val="1950"/>
+              </a:lnSpc>
+              <a:spcAft>
+                <a:spcPts val="0"/>
+              </a:spcAft>
+              <a:buNone/>
+            </a:pPr>
+            <a:r>
+              <a:rPr lang="en-US" sz="1500" b="0">
+                <a:solidFill>
+                  <a:srgbClr val="202B33"/>
+                </a:solidFill>
+                <a:latin typeface="Arial"/>
+                <a:ea typeface="Arial"/>
+                <a:cs typeface="Arial"/>
+              </a:rPr>
+              <a:t xml:space="preserve">pitch usually names one of them. Run the</a:t>
+            </a:r>
+            <a:endParaRPr lang="en-US" sz="1500"/>
+          </a:p>
+          <a:p>
+            <a:pPr marL="0" indent="0">
+              <a:lnSpc>
+                <a:spcPts val="1950"/>
+              </a:lnSpc>
+              <a:spcAft>
+                <a:spcPts val="0"/>
+              </a:spcAft>
+              <a:buNone/>
+            </a:pPr>
+            <a:r>
+              <a:rPr lang="en-US" sz="1500" b="0">
+                <a:solidFill>
+                  <a:srgbClr val="202B33"/>
+                </a:solidFill>
+                <a:latin typeface="Arial"/>
+                <a:ea typeface="Arial"/>
+                <a:cs typeface="Arial"/>
+              </a:rPr>
+              <a:t xml:space="preserve">comparison on the same corpus, queries, and</a:t>
+            </a:r>
+            <a:endParaRPr lang="en-US" sz="1500"/>
+          </a:p>
+          <a:p>
+            <a:pPr marL="0" indent="0">
+              <a:lnSpc>
+                <a:spcPts val="1950"/>
+              </a:lnSpc>
+              <a:spcAft>
+                <a:spcPts val="0"/>
+              </a:spcAft>
+              <a:buNone/>
+            </a:pPr>
+            <a:r>
+              <a:rPr lang="en-US" sz="1500" b="0">
+                <a:solidFill>
+                  <a:srgbClr val="202B33"/>
+                </a:solidFill>
+                <a:latin typeface="Arial"/>
+                <a:ea typeface="Arial"/>
+                <a:cs typeface="Arial"/>
+              </a:rPr>
+              <a:t xml:space="preserve">judgments. Otherwise you have compared two</a:t>
+            </a:r>
+            <a:endParaRPr lang="en-US" sz="1500"/>
+          </a:p>
+          <a:p>
+            <a:pPr marL="0" indent="0">
+              <a:lnSpc>
+                <a:spcPts val="1950"/>
+              </a:lnSpc>
+              <a:spcAft>
+                <a:spcPts val="0"/>
+              </a:spcAft>
+              <a:buNone/>
+            </a:pPr>
+            <a:r>
+              <a:rPr lang="en-US" sz="1500" b="0">
+                <a:solidFill>
+                  <a:srgbClr val="202B33"/>
+                </a:solidFill>
+                <a:latin typeface="Arial"/>
+                <a:ea typeface="Arial"/>
+                <a:cs typeface="Arial"/>
+              </a:rPr>
+              <a:t xml:space="preserve">demonstrations and called the difference a</a:t>
+            </a:r>
+            <a:endParaRPr lang="en-US" sz="1500"/>
+          </a:p>
+          <a:p>
+            <a:pPr marL="0" indent="0">
+              <a:lnSpc>
+                <a:spcPts val="1950"/>
+              </a:lnSpc>
+              <a:spcAft>
+                <a:spcPts val="0"/>
+              </a:spcAft>
+              <a:buNone/>
+            </a:pPr>
+            <a:r>
+              <a:rPr lang="en-US" sz="1500" b="0">
+                <a:solidFill>
+                  <a:srgbClr val="202B33"/>
+                </a:solidFill>
+                <a:latin typeface="Arial"/>
+                <a:ea typeface="Arial"/>
+                <a:cs typeface="Arial"/>
+              </a:rPr>
+              <a:t xml:space="preserve">model improvement.</a:t>
             </a:r>
             <a:endParaRPr lang="en-US" sz="1500"/>
           </a:p>
